--- a/output/deck/PRAP_소개자료.pptx
+++ b/output/deck/PRAP_소개자료.pptx
@@ -2166,7 +2166,7 @@
                 <a:ea typeface="Arial" pitchFamily="34" charset="-122"/>
                 <a:cs typeface="Arial" pitchFamily="34" charset="-120"/>
               </a:rPr>
-              <a:t>143</a:t>
+              <a:t>149</a:t>
             </a:r>
             <a:endParaRPr lang="en-US" sz="3800" dirty="0"/>
           </a:p>
@@ -11367,7 +11367,7 @@
                 <a:ea typeface="Arial" pitchFamily="34" charset="-122"/>
                 <a:cs typeface="Arial" pitchFamily="34" charset="-120"/>
               </a:rPr>
-              <a:t>143</a:t>
+              <a:t>149</a:t>
             </a:r>
             <a:endParaRPr lang="en-US" sz="2800" dirty="0"/>
           </a:p>
